--- a/W2/MSE 803 W2 Presentation.pptx
+++ b/W2/MSE 803 W2 Presentation.pptx
@@ -10,9 +10,10 @@
     <p:sldId id="258" r:id="rId4"/>
     <p:sldId id="259" r:id="rId5"/>
     <p:sldId id="260" r:id="rId6"/>
-    <p:sldId id="261" r:id="rId7"/>
-    <p:sldId id="262" r:id="rId8"/>
-    <p:sldId id="263" r:id="rId9"/>
+    <p:sldId id="264" r:id="rId7"/>
+    <p:sldId id="261" r:id="rId8"/>
+    <p:sldId id="262" r:id="rId9"/>
+    <p:sldId id="263" r:id="rId10"/>
   </p:sldIdLst>
   <p:sldSz cx="12192000" cy="6858000"/>
   <p:notesSz cx="6858000" cy="9144000"/>
@@ -14273,6 +14274,132 @@
           <a:chExt cx="0" cy="0"/>
         </a:xfrm>
       </p:grpSpPr>
+      <p:pic>
+        <p:nvPicPr>
+          <p:cNvPr id="5" name="Picture 4">
+            <a:extLst>
+              <a:ext uri="{FF2B5EF4-FFF2-40B4-BE49-F238E27FC236}">
+                <a16:creationId xmlns:a16="http://schemas.microsoft.com/office/drawing/2014/main" id="{AF9DBC89-BBEC-AD60-FE6A-07E3F8A0E380}"/>
+              </a:ext>
+            </a:extLst>
+          </p:cNvPr>
+          <p:cNvPicPr>
+            <a:picLocks noChangeAspect="1"/>
+          </p:cNvPicPr>
+          <p:nvPr/>
+        </p:nvPicPr>
+        <p:blipFill>
+          <a:blip r:embed="rId2">
+            <a:extLst>
+              <a:ext uri="{28A0092B-C50C-407E-A947-70E740481C1C}">
+                <a14:useLocalDpi xmlns:a14="http://schemas.microsoft.com/office/drawing/2010/main" val="0"/>
+              </a:ext>
+            </a:extLst>
+          </a:blip>
+          <a:stretch>
+            <a:fillRect/>
+          </a:stretch>
+        </p:blipFill>
+        <p:spPr>
+          <a:xfrm>
+            <a:off x="979715" y="1498600"/>
+            <a:ext cx="10232571" cy="4775200"/>
+          </a:xfrm>
+          <a:prstGeom prst="rect">
+            <a:avLst/>
+          </a:prstGeom>
+        </p:spPr>
+      </p:pic>
+      <p:sp>
+        <p:nvSpPr>
+          <p:cNvPr id="6" name="TextBox 5">
+            <a:extLst>
+              <a:ext uri="{FF2B5EF4-FFF2-40B4-BE49-F238E27FC236}">
+                <a16:creationId xmlns:a16="http://schemas.microsoft.com/office/drawing/2014/main" id="{23C3E02C-443A-A27A-5045-FF56416AB717}"/>
+              </a:ext>
+            </a:extLst>
+          </p:cNvPr>
+          <p:cNvSpPr txBox="1"/>
+          <p:nvPr/>
+        </p:nvSpPr>
+        <p:spPr>
+          <a:xfrm>
+            <a:off x="599439" y="416560"/>
+            <a:ext cx="10939417" cy="707886"/>
+          </a:xfrm>
+          <a:prstGeom prst="rect">
+            <a:avLst/>
+          </a:prstGeom>
+          <a:noFill/>
+        </p:spPr>
+        <p:txBody>
+          <a:bodyPr wrap="square" rtlCol="0">
+            <a:spAutoFit/>
+          </a:bodyPr>
+          <a:lstStyle/>
+          <a:p>
+            <a:r>
+              <a:rPr lang="pt-BR" sz="4000" dirty="0" err="1"/>
+              <a:t>Beijin</a:t>
+            </a:r>
+            <a:r>
+              <a:rPr lang="pt-BR" sz="4000" dirty="0"/>
+              <a:t> </a:t>
+            </a:r>
+            <a:r>
+              <a:rPr lang="pt-BR" sz="4000" dirty="0" err="1"/>
+              <a:t>Multi-site</a:t>
+            </a:r>
+            <a:r>
+              <a:rPr lang="pt-BR" sz="4000" dirty="0"/>
+              <a:t> Air </a:t>
+            </a:r>
+            <a:r>
+              <a:rPr lang="pt-BR" sz="4000" dirty="0" err="1"/>
+              <a:t>Quality</a:t>
+            </a:r>
+            <a:r>
+              <a:rPr lang="pt-BR" sz="4000" dirty="0"/>
+              <a:t> – PM2.5 </a:t>
+            </a:r>
+            <a:r>
+              <a:rPr lang="pt-BR" sz="4000" dirty="0" err="1"/>
+              <a:t>concentration</a:t>
+            </a:r>
+            <a:endParaRPr lang="en-US" sz="4000" dirty="0"/>
+          </a:p>
+        </p:txBody>
+      </p:sp>
+    </p:spTree>
+    <p:extLst>
+      <p:ext uri="{BB962C8B-B14F-4D97-AF65-F5344CB8AC3E}">
+        <p14:creationId xmlns:p14="http://schemas.microsoft.com/office/powerpoint/2010/main" val="1938733767"/>
+      </p:ext>
+    </p:extLst>
+  </p:cSld>
+  <p:clrMapOvr>
+    <a:masterClrMapping/>
+  </p:clrMapOvr>
+</p:sld>
+</file>
+
+<file path=ppt/slides/slide7.xml><?xml version="1.0" encoding="utf-8"?>
+<p:sld xmlns:a="http://schemas.openxmlformats.org/drawingml/2006/main" xmlns:r="http://schemas.openxmlformats.org/officeDocument/2006/relationships" xmlns:p="http://schemas.openxmlformats.org/presentationml/2006/main">
+  <p:cSld>
+    <p:spTree>
+      <p:nvGrpSpPr>
+        <p:cNvPr id="1" name=""/>
+        <p:cNvGrpSpPr/>
+        <p:nvPr/>
+      </p:nvGrpSpPr>
+      <p:grpSpPr>
+        <a:xfrm>
+          <a:off x="0" y="0"/>
+          <a:ext cx="0" cy="0"/>
+          <a:chOff x="0" y="0"/>
+          <a:chExt cx="0" cy="0"/>
+        </a:xfrm>
+      </p:grpSpPr>
       <p:sp>
         <p:nvSpPr>
           <p:cNvPr id="4" name="TextBox 3">
@@ -14403,7 +14530,7 @@
 </p:sld>
 </file>
 
-<file path=ppt/slides/slide7.xml><?xml version="1.0" encoding="utf-8"?>
+<file path=ppt/slides/slide8.xml><?xml version="1.0" encoding="utf-8"?>
 <p:sld xmlns:a="http://schemas.openxmlformats.org/drawingml/2006/main" xmlns:r="http://schemas.openxmlformats.org/officeDocument/2006/relationships" xmlns:p="http://schemas.openxmlformats.org/presentationml/2006/main">
   <p:cSld>
     <p:spTree>
@@ -15400,7 +15527,7 @@
 </p:sld>
 </file>
 
-<file path=ppt/slides/slide8.xml><?xml version="1.0" encoding="utf-8"?>
+<file path=ppt/slides/slide9.xml><?xml version="1.0" encoding="utf-8"?>
 <p:sld xmlns:a="http://schemas.openxmlformats.org/drawingml/2006/main" xmlns:r="http://schemas.openxmlformats.org/officeDocument/2006/relationships" xmlns:p="http://schemas.openxmlformats.org/presentationml/2006/main">
   <p:cSld>
     <p:spTree>

--- a/W2/MSE 803 W2 Presentation.pptx
+++ b/W2/MSE 803 W2 Presentation.pptx
@@ -6785,7 +6785,7 @@
                         <a:buNone/>
                       </a:pPr>
                       <a:r>
-                        <a:rPr lang="en-US" sz="1600" b="0" i="0" u="none" strike="noStrike">
+                        <a:rPr lang="en-US" sz="1600" b="0" i="0" u="none" strike="noStrike" dirty="0">
                           <a:solidFill>
                             <a:srgbClr val="000000"/>
                           </a:solidFill>
@@ -14603,7 +14603,7 @@
             </a:r>
             <a:r>
               <a:rPr lang="pt-BR" sz="4000" dirty="0"/>
-              <a:t> – p-</a:t>
+              <a:t> – PM2.5 p-</a:t>
             </a:r>
             <a:r>
               <a:rPr lang="pt-BR" sz="4000" dirty="0" err="1"/>
